--- a/ゲーム科1年/01_後期/プログラミングⅢ/13_純粋仮想関数.pptx
+++ b/ゲーム科1年/01_後期/プログラミングⅢ/13_純粋仮想関数.pptx
@@ -264,7 +264,7 @@
           <a:p>
             <a:fld id="{E9CC885B-4903-4D54-9A93-00025F12DED9}" type="datetimeFigureOut">
               <a:rPr kumimoji="1" lang="ja-JP" altLang="en-US" smtClean="0"/>
-              <a:t>2024/11/11</a:t>
+              <a:t>2025/3/3</a:t>
             </a:fld>
             <a:endParaRPr kumimoji="1" lang="ja-JP" altLang="en-US"/>
           </a:p>
@@ -494,7 +494,7 @@
           <a:p>
             <a:fld id="{E9CC885B-4903-4D54-9A93-00025F12DED9}" type="datetimeFigureOut">
               <a:rPr kumimoji="1" lang="ja-JP" altLang="en-US" smtClean="0"/>
-              <a:t>2024/11/11</a:t>
+              <a:t>2025/3/3</a:t>
             </a:fld>
             <a:endParaRPr kumimoji="1" lang="ja-JP" altLang="en-US"/>
           </a:p>
@@ -734,7 +734,7 @@
           <a:p>
             <a:fld id="{E9CC885B-4903-4D54-9A93-00025F12DED9}" type="datetimeFigureOut">
               <a:rPr kumimoji="1" lang="ja-JP" altLang="en-US" smtClean="0"/>
-              <a:t>2024/11/11</a:t>
+              <a:t>2025/3/3</a:t>
             </a:fld>
             <a:endParaRPr kumimoji="1" lang="ja-JP" altLang="en-US"/>
           </a:p>
@@ -964,7 +964,7 @@
           <a:p>
             <a:fld id="{E9CC885B-4903-4D54-9A93-00025F12DED9}" type="datetimeFigureOut">
               <a:rPr kumimoji="1" lang="ja-JP" altLang="en-US" smtClean="0"/>
-              <a:t>2024/11/11</a:t>
+              <a:t>2025/3/3</a:t>
             </a:fld>
             <a:endParaRPr kumimoji="1" lang="ja-JP" altLang="en-US"/>
           </a:p>
@@ -1239,7 +1239,7 @@
           <a:p>
             <a:fld id="{E9CC885B-4903-4D54-9A93-00025F12DED9}" type="datetimeFigureOut">
               <a:rPr kumimoji="1" lang="ja-JP" altLang="en-US" smtClean="0"/>
-              <a:t>2024/11/11</a:t>
+              <a:t>2025/3/3</a:t>
             </a:fld>
             <a:endParaRPr kumimoji="1" lang="ja-JP" altLang="en-US"/>
           </a:p>
@@ -1568,7 +1568,7 @@
           <a:p>
             <a:fld id="{E9CC885B-4903-4D54-9A93-00025F12DED9}" type="datetimeFigureOut">
               <a:rPr kumimoji="1" lang="ja-JP" altLang="en-US" smtClean="0"/>
-              <a:t>2024/11/11</a:t>
+              <a:t>2025/3/3</a:t>
             </a:fld>
             <a:endParaRPr kumimoji="1" lang="ja-JP" altLang="en-US"/>
           </a:p>
@@ -2044,7 +2044,7 @@
           <a:p>
             <a:fld id="{E9CC885B-4903-4D54-9A93-00025F12DED9}" type="datetimeFigureOut">
               <a:rPr kumimoji="1" lang="ja-JP" altLang="en-US" smtClean="0"/>
-              <a:t>2024/11/11</a:t>
+              <a:t>2025/3/3</a:t>
             </a:fld>
             <a:endParaRPr kumimoji="1" lang="ja-JP" altLang="en-US"/>
           </a:p>
@@ -2185,7 +2185,7 @@
           <a:p>
             <a:fld id="{E9CC885B-4903-4D54-9A93-00025F12DED9}" type="datetimeFigureOut">
               <a:rPr kumimoji="1" lang="ja-JP" altLang="en-US" smtClean="0"/>
-              <a:t>2024/11/11</a:t>
+              <a:t>2025/3/3</a:t>
             </a:fld>
             <a:endParaRPr kumimoji="1" lang="ja-JP" altLang="en-US"/>
           </a:p>
@@ -2298,7 +2298,7 @@
           <a:p>
             <a:fld id="{E9CC885B-4903-4D54-9A93-00025F12DED9}" type="datetimeFigureOut">
               <a:rPr kumimoji="1" lang="ja-JP" altLang="en-US" smtClean="0"/>
-              <a:t>2024/11/11</a:t>
+              <a:t>2025/3/3</a:t>
             </a:fld>
             <a:endParaRPr kumimoji="1" lang="ja-JP" altLang="en-US"/>
           </a:p>
@@ -2641,7 +2641,7 @@
           <a:p>
             <a:fld id="{E9CC885B-4903-4D54-9A93-00025F12DED9}" type="datetimeFigureOut">
               <a:rPr kumimoji="1" lang="ja-JP" altLang="en-US" smtClean="0"/>
-              <a:t>2024/11/11</a:t>
+              <a:t>2025/3/3</a:t>
             </a:fld>
             <a:endParaRPr kumimoji="1" lang="ja-JP" altLang="en-US"/>
           </a:p>
@@ -2929,7 +2929,7 @@
           <a:p>
             <a:fld id="{E9CC885B-4903-4D54-9A93-00025F12DED9}" type="datetimeFigureOut">
               <a:rPr kumimoji="1" lang="ja-JP" altLang="en-US" smtClean="0"/>
-              <a:t>2024/11/11</a:t>
+              <a:t>2025/3/3</a:t>
             </a:fld>
             <a:endParaRPr kumimoji="1" lang="ja-JP" altLang="en-US"/>
           </a:p>
@@ -3202,7 +3202,7 @@
           <a:p>
             <a:fld id="{E9CC885B-4903-4D54-9A93-00025F12DED9}" type="datetimeFigureOut">
               <a:rPr kumimoji="1" lang="ja-JP" altLang="en-US" smtClean="0"/>
-              <a:t>2024/11/11</a:t>
+              <a:t>2025/3/3</a:t>
             </a:fld>
             <a:endParaRPr kumimoji="1" lang="ja-JP" altLang="en-US"/>
           </a:p>
@@ -4380,7 +4380,7 @@
           <a:p>
             <a:r>
               <a:rPr lang="ja-JP" altLang="en-US" sz="2400" dirty="0"/>
-              <a:t>逆に言えば</a:t>
+              <a:t>また、</a:t>
             </a:r>
             <a:r>
               <a:rPr lang="en-US" altLang="ja-JP" sz="2400" b="1" dirty="0">
@@ -4642,7 +4642,7 @@
         <p:spPr>
           <a:xfrm>
             <a:off x="567542" y="1216429"/>
-            <a:ext cx="8629285" cy="3046988"/>
+            <a:ext cx="10033516" cy="2308324"/>
           </a:xfrm>
           <a:prstGeom prst="rect">
             <a:avLst/>
@@ -4657,14 +4657,7 @@
           <a:p>
             <a:r>
               <a:rPr lang="ja-JP" altLang="en-US" sz="2400" dirty="0"/>
-              <a:t>純粋仮想関数もコンパイルエラーの要因となるので、</a:t>
-            </a:r>
-            <a:endParaRPr lang="en-US" altLang="ja-JP" sz="2400" dirty="0"/>
-          </a:p>
-          <a:p>
-            <a:r>
-              <a:rPr lang="ja-JP" altLang="en-US" sz="2400" dirty="0"/>
-              <a:t>一見プログラムしにくくするものに感じますが、</a:t>
+              <a:t>純粋仮想関数もコンパイルエラーの要因となるので不便に感じますが、</a:t>
             </a:r>
             <a:endParaRPr lang="en-US" altLang="ja-JP" sz="2400" dirty="0"/>
           </a:p>
@@ -4724,14 +4717,7 @@
           <a:p>
             <a:r>
               <a:rPr lang="ja-JP" altLang="en-US" sz="2400" dirty="0"/>
-              <a:t>これも大規模なゲーム制作やライブラリ制作、</a:t>
-            </a:r>
-            <a:endParaRPr lang="en-US" altLang="ja-JP" sz="2400" dirty="0"/>
-          </a:p>
-          <a:p>
-            <a:r>
-              <a:rPr lang="ja-JP" altLang="en-US" sz="2400" dirty="0"/>
-              <a:t>またチーム制作にも役に立ちますので、</a:t>
+              <a:t>これも大規模なプロジェクトや、チーム制作にも役に立ちますので、</a:t>
             </a:r>
             <a:endParaRPr lang="en-US" altLang="ja-JP" sz="2400" dirty="0"/>
           </a:p>
